--- a/MyManager.pptx
+++ b/MyManager.pptx
@@ -112,6 +112,11 @@
       </a:defRPr>
     </a:lvl9pPr>
   </p:defaultTextStyle>
+  <p:extLst>
+    <p:ext uri="{EFAFB233-063F-42B5-8137-9DF3F51BA10A}">
+      <p15:sldGuideLst xmlns:p15="http://schemas.microsoft.com/office/powerpoint/2012/main"/>
+    </p:ext>
+  </p:extLst>
 </p:presentation>
 </file>
 
@@ -197,7 +202,7 @@
           <a:p>
             <a:fld id="{BE1F8467-FE61-4FB0-9525-4133474C28E4}" type="datetimeFigureOut">
               <a:rPr lang="fi-FI" smtClean="0"/>
-              <a:t>6.5.2026</a:t>
+              <a:t>18.5.2026</a:t>
             </a:fld>
             <a:endParaRPr lang="fi-FI"/>
           </a:p>
@@ -698,56 +703,6 @@
           <a:p>
             <a:r>
               <a:rPr lang="en-US" dirty="0"/>
-              <a:t>XOR -&gt; LIBSODIUM</a:t>
-            </a:r>
-          </a:p>
-          <a:p>
-            <a:endParaRPr lang="en-US" dirty="0"/>
-          </a:p>
-          <a:p>
-            <a:r>
-              <a:rPr lang="en-US" dirty="0"/>
-              <a:t>🔓 </a:t>
-            </a:r>
-            <a:r>
-              <a:rPr lang="en-US" b="1" dirty="0"/>
-              <a:t>Pattern leakage</a:t>
-            </a:r>
-            <a:r>
-              <a:rPr lang="en-US" dirty="0"/>
-              <a:t>: repeating key creates predictable structure 🔓 </a:t>
-            </a:r>
-            <a:r>
-              <a:rPr lang="en-US" b="1" dirty="0"/>
-              <a:t>Known-plaintext attacks</a:t>
-            </a:r>
-            <a:r>
-              <a:rPr lang="en-US" dirty="0"/>
-              <a:t>: if attacker knows part of plaintext → key can be recovered 🔓 </a:t>
-            </a:r>
-            <a:r>
-              <a:rPr lang="en-US" b="1" dirty="0"/>
-              <a:t>No authentication</a:t>
-            </a:r>
-            <a:r>
-              <a:rPr lang="en-US" dirty="0"/>
-              <a:t>: attacker can modify ciphertext without detection 🔓 </a:t>
-            </a:r>
-            <a:r>
-              <a:rPr lang="en-US" b="1" dirty="0"/>
-              <a:t>No key strengthening</a:t>
-            </a:r>
-            <a:r>
-              <a:rPr lang="en-US" dirty="0"/>
-              <a:t>: password is used directly (very weak against brute force)</a:t>
-            </a:r>
-          </a:p>
-          <a:p>
-            <a:endParaRPr lang="en-US" dirty="0"/>
-          </a:p>
-          <a:p>
-            <a:r>
-              <a:rPr lang="en-US" dirty="0"/>
               <a:t>ENCRYPT</a:t>
             </a:r>
           </a:p>
@@ -1560,7 +1515,7 @@
           <a:p>
             <a:fld id="{073D55F9-11A3-4523-8F38-6BA37933791A}" type="datetime1">
               <a:rPr lang="en-US" smtClean="0"/>
-              <a:t>5/6/2026</a:t>
+              <a:t>5/18/2026</a:t>
             </a:fld>
             <a:endParaRPr lang="en-US"/>
           </a:p>
@@ -1762,7 +1717,7 @@
           <a:p>
             <a:fld id="{0B4E757A-3EC2-4683-9080-1A460C37C843}" type="datetime1">
               <a:rPr lang="en-US" smtClean="0"/>
-              <a:t>5/6/2026</a:t>
+              <a:t>5/18/2026</a:t>
             </a:fld>
             <a:endParaRPr lang="en-US"/>
           </a:p>
@@ -1978,7 +1933,7 @@
           <a:p>
             <a:fld id="{5CC8096C-64ED-4153-A483-5C02E44AD5C3}" type="datetime1">
               <a:rPr lang="en-US" smtClean="0"/>
-              <a:t>5/6/2026</a:t>
+              <a:t>5/18/2026</a:t>
             </a:fld>
             <a:endParaRPr lang="en-US" dirty="0"/>
           </a:p>
@@ -2211,7 +2166,7 @@
           <a:p>
             <a:fld id="{1CB9D56B-6EBE-4E5F-99D9-2A3DBDF37D0A}" type="datetime1">
               <a:rPr lang="en-US" smtClean="0"/>
-              <a:t>5/6/2026</a:t>
+              <a:t>5/18/2026</a:t>
             </a:fld>
             <a:endParaRPr lang="en-US"/>
           </a:p>
@@ -2488,7 +2443,7 @@
           <a:p>
             <a:fld id="{8C33F3CA-C7E3-432D-9282-18F13836509A}" type="datetime1">
               <a:rPr lang="en-US" smtClean="0"/>
-              <a:t>5/6/2026</a:t>
+              <a:t>5/18/2026</a:t>
             </a:fld>
             <a:endParaRPr lang="en-US" dirty="0"/>
           </a:p>
@@ -2758,7 +2713,7 @@
           <a:p>
             <a:fld id="{75BE9C62-1337-40B8-BA50-E9F4861DB4BC}" type="datetime1">
               <a:rPr lang="en-US" smtClean="0"/>
-              <a:t>5/6/2026</a:t>
+              <a:t>5/18/2026</a:t>
             </a:fld>
             <a:endParaRPr lang="en-US"/>
           </a:p>
@@ -3175,7 +3130,7 @@
           <a:p>
             <a:fld id="{47C195EB-2DA3-4B24-8725-19BC22A7BE50}" type="datetime1">
               <a:rPr lang="en-US" smtClean="0"/>
-              <a:t>5/6/2026</a:t>
+              <a:t>5/18/2026</a:t>
             </a:fld>
             <a:endParaRPr lang="en-US"/>
           </a:p>
@@ -3320,7 +3275,7 @@
           <a:p>
             <a:fld id="{F4E237E6-0076-4915-A5A8-B7C11FA4F374}" type="datetime1">
               <a:rPr lang="en-US" smtClean="0"/>
-              <a:t>5/6/2026</a:t>
+              <a:t>5/18/2026</a:t>
             </a:fld>
             <a:endParaRPr lang="en-US"/>
           </a:p>
@@ -3436,7 +3391,7 @@
           <a:p>
             <a:fld id="{3505F58F-C0B5-422A-8E5A-6B99E5D80F0A}" type="datetime1">
               <a:rPr lang="en-US" smtClean="0"/>
-              <a:t>5/6/2026</a:t>
+              <a:t>5/18/2026</a:t>
             </a:fld>
             <a:endParaRPr lang="en-US"/>
           </a:p>
@@ -3752,7 +3707,7 @@
           <a:p>
             <a:fld id="{7565E655-9687-48DF-A33F-F8824CCCB5D1}" type="datetime1">
               <a:rPr lang="en-US" smtClean="0"/>
-              <a:t>5/6/2026</a:t>
+              <a:t>5/18/2026</a:t>
             </a:fld>
             <a:endParaRPr lang="en-US"/>
           </a:p>
@@ -4048,7 +4003,7 @@
           <a:p>
             <a:fld id="{B97FD56A-AAB8-4544-A495-D0645413C9E3}" type="datetime1">
               <a:rPr lang="en-US" smtClean="0"/>
-              <a:t>5/6/2026</a:t>
+              <a:t>5/18/2026</a:t>
             </a:fld>
             <a:endParaRPr lang="en-US"/>
           </a:p>
@@ -5869,7 +5824,7 @@
             <a:fld id="{193BAB95-8DA7-460B-B00A-7037C8394FB0}" type="datetime1">
               <a:rPr lang="en-US" smtClean="0"/>
               <a:pPr/>
-              <a:t>5/6/2026</a:t>
+              <a:t>5/18/2026</a:t>
             </a:fld>
             <a:endParaRPr lang="en-US" dirty="0"/>
           </a:p>
